--- a/docs/proposals/softbank-ultraman-caravan/SB様提示用_お見積り_最低保証プラン.pptx
+++ b/docs/proposals/softbank-ultraman-caravan/SB様提示用_お見積り_最低保証プラン.pptx
@@ -3501,7 +3501,7 @@
                 <a:latin typeface="Meiryo"/>
                 <a:ea typeface="Meiryo"/>
               </a:rPr>
-              <a:t>お見積り総括:27ヶ月 合計 3.96億円(税別)+従量精算分</a:t>
+              <a:t>お見積り総括:27ヶ月 合計 3.98億円(税別)+従量精算分</a:t>
             </a:r>
           </a:p>
         </p:txBody>
@@ -3844,7 +3844,7 @@
                           <a:latin typeface="Meiryo"/>
                           <a:ea typeface="Meiryo"/>
                         </a:rPr>
-                        <a:t>10万円/日 × 基準15ライン × 234日 = 3,510現場</a:t>
+                        <a:t>10万円/日 × 基準15ライン × 235日 = 3,525現場</a:t>
                       </a:r>
                     </a:p>
                   </a:txBody>
@@ -3867,7 +3867,7 @@
                           <a:latin typeface="Meiryo"/>
                           <a:ea typeface="Meiryo"/>
                         </a:rPr>
-                        <a:t>3.51億円</a:t>
+                        <a:t>3.52億円</a:t>
                       </a:r>
                     </a:p>
                   </a:txBody>
@@ -4055,7 +4055,7 @@
                           <a:latin typeface="Meiryo"/>
                           <a:ea typeface="Meiryo"/>
                         </a:rPr>
-                        <a:t>3.96億円</a:t>
+                        <a:t>3.98億円</a:t>
                       </a:r>
                     </a:p>
                   </a:txBody>
@@ -4243,7 +4243,7 @@
                           <a:latin typeface="Meiryo"/>
                           <a:ea typeface="Meiryo"/>
                         </a:rPr>
-                        <a:t>基準で 7,020万円</a:t>
+                        <a:t>基準で 7,050万円</a:t>
                       </a:r>
                     </a:p>
                   </a:txBody>
@@ -5375,7 +5375,7 @@
                           <a:latin typeface="Meiryo"/>
                           <a:ea typeface="Meiryo"/>
                         </a:rPr>
-                        <a:t>104日</a:t>
+                        <a:t>105日</a:t>
                       </a:r>
                     </a:p>
                   </a:txBody>
@@ -5398,7 +5398,7 @@
                           <a:latin typeface="Meiryo"/>
                           <a:ea typeface="Meiryo"/>
                         </a:rPr>
-                        <a:t>1,560現場</a:t>
+                        <a:t>1,575現場</a:t>
                       </a:r>
                     </a:p>
                   </a:txBody>
@@ -5421,7 +5421,7 @@
                           <a:latin typeface="Meiryo"/>
                           <a:ea typeface="Meiryo"/>
                         </a:rPr>
-                        <a:t>15,600万円</a:t>
+                        <a:t>15,750万円</a:t>
                       </a:r>
                     </a:p>
                   </a:txBody>
@@ -5467,7 +5467,7 @@
                           <a:latin typeface="Meiryo"/>
                           <a:ea typeface="Meiryo"/>
                         </a:rPr>
-                        <a:t>17,600万円</a:t>
+                        <a:t>17,750万円</a:t>
                       </a:r>
                     </a:p>
                   </a:txBody>
@@ -5490,7 +5490,7 @@
                           <a:latin typeface="Meiryo"/>
                           <a:ea typeface="Meiryo"/>
                         </a:rPr>
-                        <a:t>3,120万円</a:t>
+                        <a:t>3,150万円</a:t>
                       </a:r>
                     </a:p>
                   </a:txBody>
@@ -5538,7 +5538,7 @@
                           <a:latin typeface="Meiryo"/>
                           <a:ea typeface="Meiryo"/>
                         </a:rPr>
-                        <a:t>234日</a:t>
+                        <a:t>235日</a:t>
                       </a:r>
                     </a:p>
                   </a:txBody>
@@ -5561,7 +5561,7 @@
                           <a:latin typeface="Meiryo"/>
                           <a:ea typeface="Meiryo"/>
                         </a:rPr>
-                        <a:t>3,510現場</a:t>
+                        <a:t>3,525現場</a:t>
                       </a:r>
                     </a:p>
                   </a:txBody>
@@ -5584,7 +5584,7 @@
                           <a:latin typeface="Meiryo"/>
                           <a:ea typeface="Meiryo"/>
                         </a:rPr>
-                        <a:t>35,100万円</a:t>
+                        <a:t>35,250万円</a:t>
                       </a:r>
                     </a:p>
                   </a:txBody>
@@ -5630,7 +5630,7 @@
                           <a:latin typeface="Meiryo"/>
                           <a:ea typeface="Meiryo"/>
                         </a:rPr>
-                        <a:t>3.96億円</a:t>
+                        <a:t>3.98億円</a:t>
                       </a:r>
                     </a:p>
                   </a:txBody>
@@ -5653,7 +5653,7 @@
                           <a:latin typeface="Meiryo"/>
                           <a:ea typeface="Meiryo"/>
                         </a:rPr>
-                        <a:t>7,020万円</a:t>
+                        <a:t>7,050万円</a:t>
                       </a:r>
                     </a:p>
                   </a:txBody>

--- a/docs/proposals/softbank-ultraman-caravan/SB様提示用_お見積り_最低保証プラン.pptx
+++ b/docs/proposals/softbank-ultraman-caravan/SB様提示用_お見積り_最低保証プラン.pptx
@@ -3541,7 +3541,7 @@
                 <a:latin typeface="Meiryo"/>
                 <a:ea typeface="Meiryo"/>
               </a:rPr>
-              <a:t>最低開催数保証(基準15ライン分)と年間IP使用料を固定分、増枠・諸経費・許諾料・実費を従量分として整理しています</a:t>
+              <a:t>固定分(最低開催数保証と年間IP使用料)と、従量分(増枠・諸経費・許諾料・実費)に分けて記載しています</a:t>
             </a:r>
           </a:p>
         </p:txBody>
@@ -5766,7 +5766,7 @@
                 <a:latin typeface="Meiryo"/>
                 <a:ea typeface="Meiryo"/>
               </a:rPr>
-              <a:t>・各期の最低保証額は期初(第1期は契約締結時)に確定し、四半期ごとの前払いでお支払いいただきます(お支払い条件はご相談)</a:t>
+              <a:t>・各期の最低保証額は期初(第1期は契約時)に確定。四半期ごとの前払い(お支払い条件はご相談)</a:t>
             </a:r>
           </a:p>
           <a:p>
@@ -5783,7 +5783,7 @@
                 <a:latin typeface="Meiryo"/>
                 <a:ea typeface="Meiryo"/>
               </a:rPr>
-              <a:t>・期末に実績を集計し、最低保証現場数を上回った増枠分(余裕月の最大20ライン運用分)は追加で精算、下回った場合も最低保証額をお支払いいただきます</a:t>
+              <a:t>・期末に実績を集計。余裕月の増枠分は追加精算、最低保証を下回った場合も保証額をお支払いいただく</a:t>
             </a:r>
           </a:p>
           <a:p>
@@ -5800,7 +5800,7 @@
                 <a:latin typeface="Meiryo"/>
                 <a:ea typeface="Meiryo"/>
               </a:rPr>
-              <a:t>・第1期(2027年1〜3月)は立ち上げ期のため、会場確定状況にかかわらず15ライン体制を貴社専属で確保する定額期間として運用します</a:t>
+              <a:t>・第1期(2027年1〜3月)は立ち上げ期として、会場の確定状況にかかわらず15ライン体制を貴社専属で確保する定額期間</a:t>
             </a:r>
           </a:p>
           <a:p>
@@ -5939,7 +5939,7 @@
                 <a:latin typeface="Meiryo"/>
                 <a:ea typeface="Meiryo"/>
               </a:rPr>
-              <a:t>貴社制作のイベントキット・ノベルティ・店頭訴求ツールについて、製造数量ベースで契約年度ごとに最低保証を設定します</a:t>
+              <a:t>貴社制作のイベントキット・ノベルティ・店頭訴求ツールが対象。製造数量をもとに契約年度ごとに最低保証を設定</a:t>
             </a:r>
           </a:p>
         </p:txBody>

--- a/docs/proposals/softbank-ultraman-caravan/SB様提示用_お見積り_最低保証プラン.pptx
+++ b/docs/proposals/softbank-ultraman-caravan/SB様提示用_お見積り_最低保証プラン.pptx
@@ -7055,7 +7055,7 @@
                           <a:latin typeface="Meiryo"/>
                           <a:ea typeface="Meiryo"/>
                         </a:rPr>
-                        <a:t>北関東エリアは2027年1〜3月は実施不可。ウルトラセブンは対象外。出演は8ヒーロー(権利調整により一部変動の場合あり)</a:t>
+                        <a:t>関信越エリア(埼玉・茨城・群馬・栃木・山梨・長野・新潟)は2027年1〜3月は実施不可。ウルトラセブンは対象外。出演は8ヒーロー(権利調整により一部変動の場合あり)</a:t>
                       </a:r>
                     </a:p>
                   </a:txBody>

--- a/docs/proposals/softbank-ultraman-caravan/SB様提示用_お見積り_最低保証プラン.pptx
+++ b/docs/proposals/softbank-ultraman-caravan/SB様提示用_お見積り_最低保証プラン.pptx
@@ -3915,7 +3915,7 @@
                           <a:latin typeface="Meiryo"/>
                           <a:ea typeface="Meiryo"/>
                         </a:rPr>
-                        <a:t>年間IP使用料</a:t>
+                        <a:t>IP使用料</a:t>
                       </a:r>
                     </a:p>
                   </a:txBody>
@@ -3938,7 +3938,7 @@
                           <a:latin typeface="Meiryo"/>
                           <a:ea typeface="Meiryo"/>
                         </a:rPr>
-                        <a:t>2,000万円/年(2029年1〜3月は3ヶ月分)</a:t>
+                        <a:t>2,000万円/年×27ヶ月分。契約時に一括前払い</a:t>
                       </a:r>
                     </a:p>
                   </a:txBody>
@@ -4832,7 +4832,7 @@
         </p:nvGraphicFramePr>
         <p:xfrm>
           <a:off x="640080" y="1417320"/>
-          <a:ext cx="10881356" cy="2743200"/>
+          <a:ext cx="10881357" cy="2743200"/>
         </p:xfrm>
         <a:graphic>
           <a:graphicData uri="http://schemas.openxmlformats.org/drawingml/2006/table">
@@ -4841,13 +4841,13 @@
                 <a:tableStyleId>{5C22544A-7EE6-4342-B048-85BDC9FD1C3A}</a:tableStyleId>
               </a:tblPr>
               <a:tblGrid>
-                <a:gridCol w="2546701"/>
-                <a:gridCol w="1041832"/>
-                <a:gridCol w="1389109"/>
-                <a:gridCol w="1620628"/>
-                <a:gridCol w="1273350"/>
-                <a:gridCol w="1504868"/>
-                <a:gridCol w="1504868"/>
+                <a:gridCol w="2493645"/>
+                <a:gridCol w="1020127"/>
+                <a:gridCol w="1360170"/>
+                <a:gridCol w="1586864"/>
+                <a:gridCol w="1586864"/>
+                <a:gridCol w="1473517"/>
+                <a:gridCol w="1360170"/>
               </a:tblGrid>
               <a:tr h="548640">
                 <a:tc>
@@ -5118,7 +5118,19 @@
                           <a:latin typeface="Meiryo"/>
                           <a:ea typeface="Meiryo"/>
                         </a:rPr>
-                        <a:t>500万円</a:t>
+                        <a:t>4,500万円</a:t>
+                      </a:r>
+                    </a:p>
+                    <a:p>
+                      <a:r>
+                        <a:rPr sz="1100" b="0">
+                          <a:solidFill>
+                            <a:srgbClr val="1A1A1A"/>
+                          </a:solidFill>
+                          <a:latin typeface="Meiryo"/>
+                          <a:ea typeface="Meiryo"/>
+                        </a:rPr>
+                        <a:t>(27ヶ月分を契約時一括)</a:t>
                       </a:r>
                     </a:p>
                   </a:txBody>
@@ -5141,7 +5153,7 @@
                           <a:latin typeface="Meiryo"/>
                           <a:ea typeface="Meiryo"/>
                         </a:rPr>
-                        <a:t>4,400万円</a:t>
+                        <a:t>8,400万円</a:t>
                       </a:r>
                     </a:p>
                   </a:txBody>
@@ -5281,7 +5293,7 @@
                           <a:latin typeface="Meiryo"/>
                           <a:ea typeface="Meiryo"/>
                         </a:rPr>
-                        <a:t>2,000万円</a:t>
+                        <a:t>—</a:t>
                       </a:r>
                     </a:p>
                   </a:txBody>
@@ -5304,7 +5316,7 @@
                           <a:latin typeface="Meiryo"/>
                           <a:ea typeface="Meiryo"/>
                         </a:rPr>
-                        <a:t>17,600万円</a:t>
+                        <a:t>15,600万円</a:t>
                       </a:r>
                     </a:p>
                   </a:txBody>
@@ -5444,7 +5456,7 @@
                           <a:latin typeface="Meiryo"/>
                           <a:ea typeface="Meiryo"/>
                         </a:rPr>
-                        <a:t>2,000万円</a:t>
+                        <a:t>—</a:t>
                       </a:r>
                     </a:p>
                   </a:txBody>
@@ -5467,7 +5479,7 @@
                           <a:latin typeface="Meiryo"/>
                           <a:ea typeface="Meiryo"/>
                         </a:rPr>
-                        <a:t>17,750万円</a:t>
+                        <a:t>15,750万円</a:t>
                       </a:r>
                     </a:p>
                   </a:txBody>
@@ -5817,7 +5829,7 @@
                 <a:latin typeface="Meiryo"/>
                 <a:ea typeface="Meiryo"/>
               </a:rPr>
-              <a:t>・年間IP使用料は契約年度ごとの前払い(第1期は3ヶ月分)</a:t>
+              <a:t>・IP使用料は27ヶ月分(4,500万円)を契約時に一括前払い</a:t>
             </a:r>
           </a:p>
         </p:txBody>
@@ -7151,7 +7163,7 @@
                           <a:latin typeface="Meiryo"/>
                           <a:ea typeface="Meiryo"/>
                         </a:rPr>
-                        <a:t>貴社EDI発注・翌月末振込。最低保証契約のため期間一括の発注形態をご相談。すべて税別</a:t>
+                        <a:t>貴社EDI発注・翌月末振込。IP使用料は契約時に27ヶ月分を一括前払い、最低保証分は四半期前払い(ご相談)。期間一括の発注形態をご相談。すべて税別</a:t>
                       </a:r>
                     </a:p>
                   </a:txBody>

--- a/docs/proposals/softbank-ultraman-caravan/SB様提示用_お見積り_最低保証プラン.pptx
+++ b/docs/proposals/softbank-ultraman-caravan/SB様提示用_お見積り_最低保証プラン.pptx
@@ -6827,7 +6827,7 @@
                           <a:latin typeface="Meiryo"/>
                           <a:ea typeface="Meiryo"/>
                         </a:rPr>
-                        <a:t>2027年1月〜2029年3月。2026年11月末までのご締結を前提</a:t>
+                        <a:t>2027年1月〜2029年3月。2026年10月末までのご締結を前提</a:t>
                       </a:r>
                     </a:p>
                   </a:txBody>

--- a/docs/proposals/softbank-ultraman-caravan/SB様提示用_お見積り_最低保証プラン.pptx
+++ b/docs/proposals/softbank-ultraman-caravan/SB様提示用_お見積り_最低保証プラン.pptx
@@ -3248,7 +3248,7 @@
                 <a:latin typeface="Meiryo"/>
                 <a:ea typeface="Meiryo"/>
               </a:rPr>
-              <a:t>2027年1月〜2029年3月(2年3ヶ月)・基準15ライン</a:t>
+              <a:t>2027年1月〜2028年12月(2年間)・基準15ライン</a:t>
             </a:r>
           </a:p>
           <a:p>
@@ -3501,7 +3501,7 @@
                 <a:latin typeface="Meiryo"/>
                 <a:ea typeface="Meiryo"/>
               </a:rPr>
-              <a:t>お見積り総括:27ヶ月 合計 3.98億円(税別)+従量精算分</a:t>
+              <a:t>お見積り総括:24ヶ月 合計 3.55億円(税別)+従量精算分</a:t>
             </a:r>
           </a:p>
         </p:txBody>
@@ -3773,7 +3773,7 @@
                           <a:latin typeface="Meiryo"/>
                           <a:ea typeface="Meiryo"/>
                         </a:rPr>
-                        <a:t>27ヶ月合計</a:t>
+                        <a:t>24ヶ月合計</a:t>
                       </a:r>
                     </a:p>
                   </a:txBody>
@@ -3844,7 +3844,7 @@
                           <a:latin typeface="Meiryo"/>
                           <a:ea typeface="Meiryo"/>
                         </a:rPr>
-                        <a:t>10万円/日 × 基準15ライン × 235日 = 3,525現場</a:t>
+                        <a:t>10万円/日 × 基準15ライン × 210日 = 3,150現場</a:t>
                       </a:r>
                     </a:p>
                   </a:txBody>
@@ -3867,7 +3867,7 @@
                           <a:latin typeface="Meiryo"/>
                           <a:ea typeface="Meiryo"/>
                         </a:rPr>
-                        <a:t>3.52億円</a:t>
+                        <a:t>3.15億円</a:t>
                       </a:r>
                     </a:p>
                   </a:txBody>
@@ -3938,7 +3938,7 @@
                           <a:latin typeface="Meiryo"/>
                           <a:ea typeface="Meiryo"/>
                         </a:rPr>
-                        <a:t>2,000万円/年×27ヶ月分。契約時に一括前払い</a:t>
+                        <a:t>2,000万円/年×2年分。契約時に一括前払い</a:t>
                       </a:r>
                     </a:p>
                   </a:txBody>
@@ -3961,7 +3961,7 @@
                           <a:latin typeface="Meiryo"/>
                           <a:ea typeface="Meiryo"/>
                         </a:rPr>
-                        <a:t>4,500万円</a:t>
+                        <a:t>4,000万円</a:t>
                       </a:r>
                     </a:p>
                   </a:txBody>
@@ -4055,7 +4055,7 @@
                           <a:latin typeface="Meiryo"/>
                           <a:ea typeface="Meiryo"/>
                         </a:rPr>
-                        <a:t>3.98億円</a:t>
+                        <a:t>3.55億円</a:t>
                       </a:r>
                     </a:p>
                   </a:txBody>
@@ -4126,7 +4126,7 @@
                           <a:latin typeface="Meiryo"/>
                           <a:ea typeface="Meiryo"/>
                         </a:rPr>
-                        <a:t>10万円/日 × 増枠現場数(最大+470現場)</a:t>
+                        <a:t>10万円/日 × 増枠現場数(最大+440現場)</a:t>
                       </a:r>
                     </a:p>
                   </a:txBody>
@@ -4149,7 +4149,7 @@
                           <a:latin typeface="Meiryo"/>
                           <a:ea typeface="Meiryo"/>
                         </a:rPr>
-                        <a:t>最大 +4,700万円</a:t>
+                        <a:t>最大 +4,400万円</a:t>
                       </a:r>
                     </a:p>
                   </a:txBody>
@@ -4243,7 +4243,7 @@
                           <a:latin typeface="Meiryo"/>
                           <a:ea typeface="Meiryo"/>
                         </a:rPr>
-                        <a:t>基準で 7,050万円</a:t>
+                        <a:t>基準で 6,300万円</a:t>
                       </a:r>
                     </a:p>
                   </a:txBody>
@@ -5118,7 +5118,7 @@
                           <a:latin typeface="Meiryo"/>
                           <a:ea typeface="Meiryo"/>
                         </a:rPr>
-                        <a:t>4,500万円</a:t>
+                        <a:t>4,000万円</a:t>
                       </a:r>
                     </a:p>
                     <a:p>
@@ -5130,7 +5130,7 @@
                           <a:latin typeface="Meiryo"/>
                           <a:ea typeface="Meiryo"/>
                         </a:rPr>
-                        <a:t>(27ヶ月分を契約時一括)</a:t>
+                        <a:t>(2年分を契約時一括)</a:t>
                       </a:r>
                     </a:p>
                   </a:txBody>
@@ -5153,7 +5153,7 @@
                           <a:latin typeface="Meiryo"/>
                           <a:ea typeface="Meiryo"/>
                         </a:rPr>
-                        <a:t>8,400万円</a:t>
+                        <a:t>7,900万円</a:t>
                       </a:r>
                     </a:p>
                   </a:txBody>
@@ -5364,7 +5364,7 @@
                           <a:latin typeface="Meiryo"/>
                           <a:ea typeface="Meiryo"/>
                         </a:rPr>
-                        <a:t>第3期 2028年4月〜2029年3月</a:t>
+                        <a:t>第3期 2028年4月〜12月</a:t>
                       </a:r>
                     </a:p>
                   </a:txBody>
@@ -5387,7 +5387,7 @@
                           <a:latin typeface="Meiryo"/>
                           <a:ea typeface="Meiryo"/>
                         </a:rPr>
-                        <a:t>105日</a:t>
+                        <a:t>80日</a:t>
                       </a:r>
                     </a:p>
                   </a:txBody>
@@ -5410,7 +5410,7 @@
                           <a:latin typeface="Meiryo"/>
                           <a:ea typeface="Meiryo"/>
                         </a:rPr>
-                        <a:t>1,575現場</a:t>
+                        <a:t>1,200現場</a:t>
                       </a:r>
                     </a:p>
                   </a:txBody>
@@ -5433,7 +5433,7 @@
                           <a:latin typeface="Meiryo"/>
                           <a:ea typeface="Meiryo"/>
                         </a:rPr>
-                        <a:t>15,750万円</a:t>
+                        <a:t>12,000万円</a:t>
                       </a:r>
                     </a:p>
                   </a:txBody>
@@ -5479,7 +5479,7 @@
                           <a:latin typeface="Meiryo"/>
                           <a:ea typeface="Meiryo"/>
                         </a:rPr>
-                        <a:t>15,750万円</a:t>
+                        <a:t>12,000万円</a:t>
                       </a:r>
                     </a:p>
                   </a:txBody>
@@ -5502,7 +5502,7 @@
                           <a:latin typeface="Meiryo"/>
                           <a:ea typeface="Meiryo"/>
                         </a:rPr>
-                        <a:t>3,150万円</a:t>
+                        <a:t>2,400万円</a:t>
                       </a:r>
                     </a:p>
                   </a:txBody>
@@ -5527,7 +5527,7 @@
                           <a:latin typeface="Meiryo"/>
                           <a:ea typeface="Meiryo"/>
                         </a:rPr>
-                        <a:t>合計(27ヶ月)</a:t>
+                        <a:t>合計(24ヶ月)</a:t>
                       </a:r>
                     </a:p>
                   </a:txBody>
@@ -5550,7 +5550,7 @@
                           <a:latin typeface="Meiryo"/>
                           <a:ea typeface="Meiryo"/>
                         </a:rPr>
-                        <a:t>235日</a:t>
+                        <a:t>210日</a:t>
                       </a:r>
                     </a:p>
                   </a:txBody>
@@ -5573,7 +5573,7 @@
                           <a:latin typeface="Meiryo"/>
                           <a:ea typeface="Meiryo"/>
                         </a:rPr>
-                        <a:t>3,525現場</a:t>
+                        <a:t>3,150現場</a:t>
                       </a:r>
                     </a:p>
                   </a:txBody>
@@ -5596,7 +5596,7 @@
                           <a:latin typeface="Meiryo"/>
                           <a:ea typeface="Meiryo"/>
                         </a:rPr>
-                        <a:t>35,250万円</a:t>
+                        <a:t>31,500万円</a:t>
                       </a:r>
                     </a:p>
                   </a:txBody>
@@ -5619,7 +5619,7 @@
                           <a:latin typeface="Meiryo"/>
                           <a:ea typeface="Meiryo"/>
                         </a:rPr>
-                        <a:t>4,500万円</a:t>
+                        <a:t>4,000万円</a:t>
                       </a:r>
                     </a:p>
                   </a:txBody>
@@ -5642,7 +5642,7 @@
                           <a:latin typeface="Meiryo"/>
                           <a:ea typeface="Meiryo"/>
                         </a:rPr>
-                        <a:t>3.98億円</a:t>
+                        <a:t>3.55億円</a:t>
                       </a:r>
                     </a:p>
                   </a:txBody>
@@ -5665,7 +5665,7 @@
                           <a:latin typeface="Meiryo"/>
                           <a:ea typeface="Meiryo"/>
                         </a:rPr>
-                        <a:t>7,050万円</a:t>
+                        <a:t>6,300万円</a:t>
                       </a:r>
                     </a:p>
                   </a:txBody>
@@ -5829,7 +5829,7 @@
                 <a:latin typeface="Meiryo"/>
                 <a:ea typeface="Meiryo"/>
               </a:rPr>
-              <a:t>・IP使用料は27ヶ月分(4,500万円)を契約時に一括前払い</a:t>
+              <a:t>・IP使用料は2年分(4,000万円)を契約時に一括前払い</a:t>
             </a:r>
           </a:p>
         </p:txBody>
@@ -6279,7 +6279,7 @@
                           <a:latin typeface="Meiryo"/>
                           <a:ea typeface="Meiryo"/>
                         </a:rPr>
-                        <a:t>契約年度ごとに想定製造数量に基づく最低保証額を設定(第1期+第2期で1年3ヶ月分、第3期で1年分)。実績が上回る場合は差額を精算</a:t>
+                        <a:t>契約年度ごとに想定製造数量に基づく最低保証額を設定(第1期+第2期で1年3ヶ月分、第3期で9ヶ月分)。実績が上回る場合は差額を精算</a:t>
                       </a:r>
                     </a:p>
                   </a:txBody>
@@ -6327,7 +6327,7 @@
                           <a:latin typeface="Meiryo"/>
                           <a:ea typeface="Meiryo"/>
                         </a:rPr>
-                        <a:t>撮影会1開催あたり約400個 × 1,755開催(27ヶ月・基準)= 約70万個。作成単価は品目構成により確定</a:t>
+                        <a:t>撮影会1開催あたり約400個 × 1,575開催(24ヶ月・基準)= 約63万個。作成単価は品目構成により確定</a:t>
                       </a:r>
                     </a:p>
                   </a:txBody>
@@ -6375,7 +6375,7 @@
                           <a:latin typeface="Meiryo"/>
                           <a:ea typeface="Meiryo"/>
                         </a:rPr>
-                        <a:t>平均作成単価30円台の構成なら27ヶ月で約450〜500万円、高単価品(タオル・トート等)中心の構成なら数千万円規模。貴社の数量・品目確定後に確定</a:t>
+                        <a:t>平均作成単価30円台の構成なら2年間で約400〜450万円、高単価品(タオル・トート等)中心の構成なら数千万円規模。貴社の数量・品目確定後に確定</a:t>
                       </a:r>
                     </a:p>
                   </a:txBody>
@@ -6827,7 +6827,7 @@
                           <a:latin typeface="Meiryo"/>
                           <a:ea typeface="Meiryo"/>
                         </a:rPr>
-                        <a:t>2027年1月〜2029年3月。2026年10月末までのご締結を前提</a:t>
+                        <a:t>2027年1月〜2028年12月(2年間)。2026年10月末までのご締結を前提</a:t>
                       </a:r>
                     </a:p>
                   </a:txBody>
@@ -7163,7 +7163,7 @@
                           <a:latin typeface="Meiryo"/>
                           <a:ea typeface="Meiryo"/>
                         </a:rPr>
-                        <a:t>貴社EDI発注・翌月末振込。IP使用料は契約時に27ヶ月分を一括前払い、最低保証分は四半期前払い(ご相談)。期間一括の発注形態をご相談。すべて税別</a:t>
+                        <a:t>貴社EDI発注・翌月末振込。IP使用料は契約時に2年分を一括前払い、最低保証分は四半期前払い(ご相談)。期間一括の発注形態をご相談。すべて税別</a:t>
                       </a:r>
                     </a:p>
                   </a:txBody>

--- a/docs/proposals/softbank-ultraman-caravan/SB様提示用_お見積り_最低保証プラン.pptx
+++ b/docs/proposals/softbank-ultraman-caravan/SB様提示用_お見積り_最低保証プラン.pptx
@@ -6423,7 +6423,7 @@
                           <a:latin typeface="Meiryo"/>
                           <a:ea typeface="Meiryo"/>
                         </a:rPr>
-                        <a:t>品目ごとの仮申請→当社監修→製造。製造数量は四半期ごとにご報告いただき精算</a:t>
+                        <a:t>品目ごとの仮申請→当社監修→製造。製造数量は四半期ごとに製造証憑(工場の納品書など)を添えてご報告いただき精算</a:t>
                       </a:r>
                     </a:p>
                   </a:txBody>
@@ -6730,7 +6730,7 @@
         </p:nvGraphicFramePr>
         <p:xfrm>
           <a:off x="640080" y="1417320"/>
-          <a:ext cx="10881358" cy="4754880"/>
+          <a:ext cx="10881358" cy="4279392"/>
         </p:xfrm>
         <a:graphic>
           <a:graphicData uri="http://schemas.openxmlformats.org/drawingml/2006/table">
@@ -6948,7 +6948,7 @@
                           <a:latin typeface="Meiryo"/>
                           <a:ea typeface="Meiryo"/>
                         </a:rPr>
-                        <a:t>中途解約</a:t>
+                        <a:t>ライン供給</a:t>
                       </a:r>
                     </a:p>
                   </a:txBody>
@@ -6971,7 +6971,7 @@
                           <a:latin typeface="Meiryo"/>
                           <a:ea typeface="Meiryo"/>
                         </a:rPr>
-                        <a:t>残期間の最低保証額を精算</a:t>
+                        <a:t>基準15ライン。余裕月(1・4・6・11・12月)は最大20ライン。2・3・8・9月は当社主催行事との調整月</a:t>
                       </a:r>
                     </a:p>
                   </a:txBody>
@@ -6996,7 +6996,7 @@
                           <a:latin typeface="Meiryo"/>
                           <a:ea typeface="Meiryo"/>
                         </a:rPr>
-                        <a:t>ライン供給</a:t>
+                        <a:t>エリア・キャラクター</a:t>
                       </a:r>
                     </a:p>
                   </a:txBody>
@@ -7019,7 +7019,7 @@
                           <a:latin typeface="Meiryo"/>
                           <a:ea typeface="Meiryo"/>
                         </a:rPr>
-                        <a:t>基準15ライン。余裕月(1・4・6・11・12月)は最大20ライン。2・3・8・9月は当社主催行事との調整月</a:t>
+                        <a:t>関信越エリア(埼玉・茨城・群馬・栃木・山梨・長野・新潟)は2027年1〜3月は実施不可。ウルトラセブンは対象外。出演は8ヒーロー(権利調整により一部変動の場合あり)</a:t>
                       </a:r>
                     </a:p>
                   </a:txBody>
@@ -7044,7 +7044,7 @@
                           <a:latin typeface="Meiryo"/>
                           <a:ea typeface="Meiryo"/>
                         </a:rPr>
-                        <a:t>エリア・キャラクター</a:t>
+                        <a:t>排他</a:t>
                       </a:r>
                     </a:p>
                   </a:txBody>
@@ -7067,7 +7067,7 @@
                           <a:latin typeface="Meiryo"/>
                           <a:ea typeface="Meiryo"/>
                         </a:rPr>
-                        <a:t>関信越エリア(埼玉・茨城・群馬・栃木・山梨・長野・新潟)は2027年1〜3月は実施不可。ウルトラセブンは対象外。出演は8ヒーロー(権利調整により一部変動の場合あり)</a:t>
+                        <a:t>契約期間中、当社は国内の他の携帯キャリア(3社)との店頭イベント契約を行いません</a:t>
                       </a:r>
                     </a:p>
                   </a:txBody>
@@ -7092,7 +7092,7 @@
                           <a:latin typeface="Meiryo"/>
                           <a:ea typeface="Meiryo"/>
                         </a:rPr>
-                        <a:t>排他</a:t>
+                        <a:t>お支払い</a:t>
                       </a:r>
                     </a:p>
                   </a:txBody>
@@ -7115,7 +7115,7 @@
                           <a:latin typeface="Meiryo"/>
                           <a:ea typeface="Meiryo"/>
                         </a:rPr>
-                        <a:t>契約期間中、当社は国内の他の携帯キャリア(3社)との店頭イベント契約を行いません</a:t>
+                        <a:t>貴社EDI発注・翌月末振込。IP使用料は契約時に2年分を一括前払い、最低保証分は四半期前払い(ご相談)。期間一括の発注形態をご相談。すべて税別</a:t>
                       </a:r>
                     </a:p>
                   </a:txBody>
@@ -7140,7 +7140,7 @@
                           <a:latin typeface="Meiryo"/>
                           <a:ea typeface="Meiryo"/>
                         </a:rPr>
-                        <a:t>お支払い</a:t>
+                        <a:t>有効期限</a:t>
                       </a:r>
                     </a:p>
                   </a:txBody>
@@ -7163,61 +7163,13 @@
                           <a:latin typeface="Meiryo"/>
                           <a:ea typeface="Meiryo"/>
                         </a:rPr>
-                        <a:t>貴社EDI発注・翌月末振込。IP使用料は契約時に2年分を一括前払い、最低保証分は四半期前払い(ご相談)。期間一括の発注形態をご相談。すべて税別</a:t>
+                        <a:t>本見積りの有効期限は発行日より30日</a:t>
                       </a:r>
                     </a:p>
                   </a:txBody>
                   <a:tcPr anchor="ctr" marL="73152" marR="73152">
                     <a:solidFill>
                       <a:srgbClr val="F2F4F6"/>
-                    </a:solidFill>
-                  </a:tcPr>
-                </a:tc>
-              </a:tr>
-              <a:tr h="475488">
-                <a:tc>
-                  <a:txBody>
-                    <a:bodyPr/>
-                    <a:lstStyle/>
-                    <a:p>
-                      <a:r>
-                        <a:rPr sz="1050" b="1">
-                          <a:solidFill>
-                            <a:srgbClr val="1A1A1A"/>
-                          </a:solidFill>
-                          <a:latin typeface="Meiryo"/>
-                          <a:ea typeface="Meiryo"/>
-                        </a:rPr>
-                        <a:t>有効期限</a:t>
-                      </a:r>
-                    </a:p>
-                  </a:txBody>
-                  <a:tcPr anchor="ctr" marL="73152" marR="73152">
-                    <a:solidFill>
-                      <a:srgbClr val="FFFFFF"/>
-                    </a:solidFill>
-                  </a:tcPr>
-                </a:tc>
-                <a:tc>
-                  <a:txBody>
-                    <a:bodyPr/>
-                    <a:lstStyle/>
-                    <a:p>
-                      <a:r>
-                        <a:rPr sz="1050" b="0">
-                          <a:solidFill>
-                            <a:srgbClr val="1A1A1A"/>
-                          </a:solidFill>
-                          <a:latin typeface="Meiryo"/>
-                          <a:ea typeface="Meiryo"/>
-                        </a:rPr>
-                        <a:t>本見積りの有効期限は発行日より30日</a:t>
-                      </a:r>
-                    </a:p>
-                  </a:txBody>
-                  <a:tcPr anchor="ctr" marL="73152" marR="73152">
-                    <a:solidFill>
-                      <a:srgbClr val="FFFFFF"/>
                     </a:solidFill>
                   </a:tcPr>
                 </a:tc>
